--- a/assets/pptx/catalog-112.pptx
+++ b/assets/pptx/catalog-112.pptx
@@ -3400,7 +3400,7 @@
                 <a:ea typeface="Ebrima"/>
                 <a:cs typeface="Ebrima"/>
               </a:rPr>
-              <a:t>(2x)</a:t>
+              <a:t>2x</a:t>
             </a:r>
           </a:p>
         </p:txBody>
@@ -3534,7 +3534,7 @@
                 <a:ea typeface="Ebrima"/>
                 <a:cs typeface="Ebrima"/>
               </a:rPr>
-              <a:t>በመሃል ገብቶ, (2x), ስንጨነቅ , የሚራራልን, (2x)</a:t>
+              <a:t>በመሃል ገብቶ, 2x, ስንጨነቅ , የሚራራልን, 2x</a:t>
             </a:r>
           </a:p>
         </p:txBody>
@@ -3735,7 +3735,7 @@
                 <a:ea typeface="Ebrima"/>
                 <a:cs typeface="Ebrima"/>
               </a:rPr>
-              <a:t>(2x)</a:t>
+              <a:t>2x</a:t>
             </a:r>
           </a:p>
         </p:txBody>
@@ -3869,7 +3869,7 @@
                 <a:ea typeface="Ebrima"/>
                 <a:cs typeface="Ebrima"/>
               </a:rPr>
-              <a:t>ተራራውንም ሜዳ አድርጓልና አድርጓልና (2x)</a:t>
+              <a:t>ተራራውንም ሜዳ አድርጓልና አድርጓልና 2x</a:t>
             </a:r>
           </a:p>
         </p:txBody>
@@ -3936,7 +3936,7 @@
                 <a:ea typeface="Ebrima"/>
                 <a:cs typeface="Ebrima"/>
               </a:rPr>
-              <a:t>እራርቶልናል (4x)</a:t>
+              <a:t>እራርቶልናል 4x</a:t>
             </a:r>
           </a:p>
         </p:txBody>
@@ -4003,7 +4003,7 @@
                 <a:ea typeface="Ebrima"/>
                 <a:cs typeface="Ebrima"/>
               </a:rPr>
-              <a:t>ዛሬም አምነዋለሁ ነገም አምነዋለሁ ዘለዓለም አምነዋለሁ (2x)</a:t>
+              <a:t>ዛሬም አምነዋለሁ ነገም አምነዋለሁ ዘለዓለም አምነዋለሁ 2x</a:t>
             </a:r>
           </a:p>
         </p:txBody>
@@ -4271,7 +4271,7 @@
                 <a:ea typeface="Ebrima"/>
                 <a:cs typeface="Ebrima"/>
               </a:rPr>
-              <a:t>ፊቴ የቆመው ተራራ ደልዳላ ሜዳ ሆነልኝ (2x)</a:t>
+              <a:t>ፊቴ የቆመው ተራራ ደልዳላ ሜዳ ሆነልኝ 2x</a:t>
             </a:r>
           </a:p>
         </p:txBody>
@@ -4405,7 +4405,7 @@
                 <a:ea typeface="Ebrima"/>
                 <a:cs typeface="Ebrima"/>
               </a:rPr>
-              <a:t>ተራራውንም ሜዳ አድርጓልና አድርጓልና (2x)</a:t>
+              <a:t>ተራራውንም ሜዳ አድርጓልና አድርጓልና 2x</a:t>
             </a:r>
           </a:p>
         </p:txBody>
@@ -4472,7 +4472,7 @@
                 <a:ea typeface="Ebrima"/>
                 <a:cs typeface="Ebrima"/>
               </a:rPr>
-              <a:t>ዛሬም አምነዋለሁ ነገም አምነዋለሁ ዘለዓለም አምነዋለሁ (2x)</a:t>
+              <a:t>ዛሬም አምነዋለሁ ነገም አምነዋለሁ ዘለዓለም አምነዋለሁ 2x</a:t>
             </a:r>
           </a:p>
         </p:txBody>
@@ -4539,7 +4539,7 @@
                 <a:ea typeface="Ebrima"/>
                 <a:cs typeface="Ebrima"/>
               </a:rPr>
-              <a:t>ቸር ነውና መቼ ይተወናል ቸር ነውና መቼ ይረሳናል (2x)</a:t>
+              <a:t>ቸር ነውና መቼ ይተወናል ቸር ነውና መቼ ይረሳናል 2x</a:t>
             </a:r>
           </a:p>
         </p:txBody>
@@ -4606,7 +4606,7 @@
                 <a:ea typeface="Ebrima"/>
                 <a:cs typeface="Ebrima"/>
               </a:rPr>
-              <a:t>ለረዳን , እንዲህ ላቆመን, (2x), በየዕለቱ , ለሚመራን, (2x), ነፍሳችንን , እያፈሰስን, (2x)</a:t>
+              <a:t>ለረዳን , እንዲህ ላቆመን, 2x, በየዕለቱ , ለሚመራን, 2x, ነፍሳችንን , እያፈሰስን, 2x</a:t>
             </a:r>
           </a:p>
         </p:txBody>
@@ -4807,7 +4807,7 @@
                 <a:ea typeface="Ebrima"/>
                 <a:cs typeface="Ebrima"/>
               </a:rPr>
-              <a:t>(2x)</a:t>
+              <a:t>2x</a:t>
             </a:r>
           </a:p>
         </p:txBody>
@@ -4874,7 +4874,7 @@
                 <a:ea typeface="Ebrima"/>
                 <a:cs typeface="Ebrima"/>
               </a:rPr>
-              <a:t>እራርቶልናል (4x)</a:t>
+              <a:t>እራርቶልናል 4x</a:t>
             </a:r>
           </a:p>
         </p:txBody>
@@ -4941,7 +4941,7 @@
                 <a:ea typeface="Ebrima"/>
                 <a:cs typeface="Ebrima"/>
               </a:rPr>
-              <a:t>ቸር ነውና መቼ ይተወናል ቸር ነውና መቼ ይረሳናል (2x)</a:t>
+              <a:t>ቸር ነውና መቼ ይተወናል ቸር ነውና መቼ ይረሳናል 2x</a:t>
             </a:r>
           </a:p>
         </p:txBody>
